--- a/docs/pitch/HeySam-Connection-Pulse.pptx
+++ b/docs/pitch/HeySam-Connection-Pulse.pptx
@@ -4767,7 +4767,7 @@
                 <a:sym typeface="Nunito Sans"/>
                 <a:hlinkClick r:id="rId3"/>
               </a:rPr>
-              <a:t>https://github.com/davidribeiro-dev/H4I-HeySam-Buildathon</a:t>
+              <a:t>https://github.com/dribeiro0/H4I-HeySam-Buildathon</a:t>
             </a:r>
             <a:r>
               <a:rPr lang="en-US" sz="2200">
